--- a/tests/fixtures/sample_deck.pptx
+++ b/tests/fixtures/sample_deck.pptx
@@ -680,7 +680,7 @@
           <a:p>
             <a:r>
               <a:rPr lang="en-US" dirty="0"/>
-              <a:t>Speaker notes for slide 3: Thank You.</a:t>
+              <a:t/>
             </a:r>
             <a:endParaRPr lang="en-US" dirty="0"/>
           </a:p>
